--- a/docs/slides/COIL_2_data_workshop.pptx
+++ b/docs/slides/COIL_2_data_workshop.pptx
@@ -2185,7 +2185,7 @@
                 <a:ea typeface="Calibri" pitchFamily="34" charset="-122"/>
                 <a:cs typeface="Calibri" pitchFamily="34" charset="-120"/>
               </a:rPr>
-              <a:t>Week 3 · 26 Oct – 1 Nov 2026 · 45 minutes · Microsoft Teams</a:t>
+              <a:t>Week 3 · 2 Nov – 8 Nov 2026 · 45 minutes · Microsoft Teams</a:t>
             </a:r>
             <a:endParaRPr lang="en-US" sz="1200" dirty="0"/>
           </a:p>
